--- a/slides/03_describe_data copy.pptx
+++ b/slides/03_describe_data copy.pptx
@@ -365,7 +365,7 @@
           <a:p>
             <a:fld id="{EFFBEA87-A981-1343-B38D-AB9C959BA66C}" type="datetimeFigureOut">
               <a:rPr lang="en-US" smtClean="0"/>
-              <a:t>1/29/25</a:t>
+              <a:t>1/18/26</a:t>
             </a:fld>
             <a:endParaRPr lang="en-US"/>
           </a:p>
@@ -576,7 +576,7 @@
           <a:p>
             <a:fld id="{EFFBEA87-A981-1343-B38D-AB9C959BA66C}" type="datetimeFigureOut">
               <a:rPr lang="en-US" smtClean="0"/>
-              <a:t>1/29/25</a:t>
+              <a:t>1/18/26</a:t>
             </a:fld>
             <a:endParaRPr lang="en-US"/>
           </a:p>
@@ -791,7 +791,7 @@
           <a:p>
             <a:fld id="{EFFBEA87-A981-1343-B38D-AB9C959BA66C}" type="datetimeFigureOut">
               <a:rPr lang="en-US" smtClean="0"/>
-              <a:t>1/29/25</a:t>
+              <a:t>1/18/26</a:t>
             </a:fld>
             <a:endParaRPr lang="en-US"/>
           </a:p>
@@ -992,7 +992,7 @@
           <a:p>
             <a:fld id="{EFFBEA87-A981-1343-B38D-AB9C959BA66C}" type="datetimeFigureOut">
               <a:rPr lang="en-US" smtClean="0"/>
-              <a:t>1/29/25</a:t>
+              <a:t>1/18/26</a:t>
             </a:fld>
             <a:endParaRPr lang="en-US"/>
           </a:p>
@@ -1271,7 +1271,7 @@
           <a:p>
             <a:fld id="{EFFBEA87-A981-1343-B38D-AB9C959BA66C}" type="datetimeFigureOut">
               <a:rPr lang="en-US" smtClean="0"/>
-              <a:t>1/29/25</a:t>
+              <a:t>1/18/26</a:t>
             </a:fld>
             <a:endParaRPr lang="en-US"/>
           </a:p>
@@ -1539,7 +1539,7 @@
           <a:p>
             <a:fld id="{EFFBEA87-A981-1343-B38D-AB9C959BA66C}" type="datetimeFigureOut">
               <a:rPr lang="en-US" smtClean="0"/>
-              <a:t>1/29/25</a:t>
+              <a:t>1/18/26</a:t>
             </a:fld>
             <a:endParaRPr lang="en-US"/>
           </a:p>
@@ -1955,7 +1955,7 @@
           <a:p>
             <a:fld id="{EFFBEA87-A981-1343-B38D-AB9C959BA66C}" type="datetimeFigureOut">
               <a:rPr lang="en-US" smtClean="0"/>
-              <a:t>1/29/25</a:t>
+              <a:t>1/18/26</a:t>
             </a:fld>
             <a:endParaRPr lang="en-US"/>
           </a:p>
@@ -2104,7 +2104,7 @@
           <a:p>
             <a:fld id="{EFFBEA87-A981-1343-B38D-AB9C959BA66C}" type="datetimeFigureOut">
               <a:rPr lang="en-US" smtClean="0"/>
-              <a:t>1/29/25</a:t>
+              <a:t>1/18/26</a:t>
             </a:fld>
             <a:endParaRPr lang="en-US"/>
           </a:p>
@@ -2230,7 +2230,7 @@
           <a:p>
             <a:fld id="{EFFBEA87-A981-1343-B38D-AB9C959BA66C}" type="datetimeFigureOut">
               <a:rPr lang="en-US" smtClean="0"/>
-              <a:t>1/29/25</a:t>
+              <a:t>1/18/26</a:t>
             </a:fld>
             <a:endParaRPr lang="en-US"/>
           </a:p>
@@ -2481,7 +2481,7 @@
           <a:p>
             <a:fld id="{EFFBEA87-A981-1343-B38D-AB9C959BA66C}" type="datetimeFigureOut">
               <a:rPr lang="en-US" smtClean="0"/>
-              <a:t>1/29/25</a:t>
+              <a:t>1/18/26</a:t>
             </a:fld>
             <a:endParaRPr lang="en-US"/>
           </a:p>
@@ -2926,7 +2926,7 @@
           <a:p>
             <a:fld id="{EFFBEA87-A981-1343-B38D-AB9C959BA66C}" type="datetimeFigureOut">
               <a:rPr lang="en-US" smtClean="0"/>
-              <a:t>1/29/25</a:t>
+              <a:t>1/18/26</a:t>
             </a:fld>
             <a:endParaRPr lang="en-US"/>
           </a:p>
@@ -3093,6 +3093,13 @@
             <a:schemeClr val="lt1"/>
           </a:fontRef>
         </p:style>
+        <p:txBody>
+          <a:bodyPr/>
+          <a:lstStyle/>
+          <a:p>
+            <a:endParaRPr lang="en-US"/>
+          </a:p>
+        </p:txBody>
       </p:sp>
       <p:pic>
         <p:nvPicPr>
@@ -3253,7 +3260,7 @@
           <a:p>
             <a:fld id="{EFFBEA87-A981-1343-B38D-AB9C959BA66C}" type="datetimeFigureOut">
               <a:rPr lang="en-US" smtClean="0"/>
-              <a:t>1/29/25</a:t>
+              <a:t>1/18/26</a:t>
             </a:fld>
             <a:endParaRPr lang="en-US"/>
           </a:p>
@@ -3791,13 +3798,13 @@
         </p:spPr>
         <p:txBody>
           <a:bodyPr>
-            <a:normAutofit fontScale="92500" lnSpcReduction="20000"/>
+            <a:normAutofit fontScale="85000" lnSpcReduction="20000"/>
           </a:bodyPr>
           <a:lstStyle/>
           <a:p>
             <a:r>
               <a:rPr lang="en-US" dirty="0"/>
-              <a:t>Describing data and basic stats. (Chapter 3 – cutoff chapter for exam)</a:t>
+              <a:t>Describing data and basic stats. (Chapter 3)</a:t>
             </a:r>
           </a:p>
           <a:p>
@@ -3828,9 +3835,16 @@
             </a:r>
           </a:p>
           <a:p>
-            <a:r>
-              <a:rPr lang="en-US" dirty="0"/>
-              <a:t>If you guys don’t have questions or want to ask</a:t>
+            <a:pPr lvl="1"/>
+            <a:r>
+              <a:rPr lang="en-US" dirty="0"/>
+              <a:t>You really want to start planning! It is different doing it solo. </a:t>
+            </a:r>
+          </a:p>
+          <a:p>
+            <a:r>
+              <a:rPr lang="en-US" dirty="0"/>
+              <a:t>If you guys don’t have questions or want to ask complex stuff…</a:t>
             </a:r>
           </a:p>
           <a:p>
